--- a/slides/slide_05.pptx
+++ b/slides/slide_05.pptx
@@ -26,61 +26,38 @@
       <p:bold r:id="rId9"/>
     </p:embeddedFont>
     <p:embeddedFont>
-      <p:font typeface="Bebas Neue" panose="020B0606020202050201" pitchFamily="2" charset="0"/>
+      <p:font typeface="Hanken Grotesk" panose="020B0604020202020204" charset="0"/>
       <p:regular r:id="rId10"/>
-    </p:embeddedFont>
-    <p:embeddedFont>
-      <p:font typeface="DM Mono" panose="020B0509040201040103" pitchFamily="1" charset="0"/>
-      <p:regular r:id="rId11"/>
+      <p:bold r:id="rId11"/>
       <p:italic r:id="rId12"/>
-    </p:embeddedFont>
-    <p:embeddedFont>
-      <p:font typeface="Hanken Grotesk" panose="020B0604020202020204" charset="0"/>
-      <p:regular r:id="rId13"/>
-      <p:bold r:id="rId14"/>
-      <p:italic r:id="rId15"/>
-      <p:boldItalic r:id="rId16"/>
-    </p:embeddedFont>
-    <p:embeddedFont>
-      <p:font typeface="Open Sans" panose="020B0606030504020204" pitchFamily="2" charset="0"/>
-      <p:regular r:id="rId17"/>
-      <p:bold r:id="rId18"/>
-      <p:italic r:id="rId19"/>
-      <p:boldItalic r:id="rId20"/>
+      <p:boldItalic r:id="rId13"/>
     </p:embeddedFont>
     <p:embeddedFont>
       <p:font typeface="Raleway" pitchFamily="2" charset="0"/>
-      <p:regular r:id="rId21"/>
-      <p:bold r:id="rId22"/>
-      <p:italic r:id="rId23"/>
-      <p:boldItalic r:id="rId24"/>
+      <p:regular r:id="rId14"/>
+      <p:bold r:id="rId15"/>
+      <p:italic r:id="rId16"/>
+      <p:boldItalic r:id="rId17"/>
     </p:embeddedFont>
     <p:embeddedFont>
       <p:font typeface="Raleway Black" pitchFamily="2" charset="0"/>
-      <p:bold r:id="rId25"/>
-      <p:boldItalic r:id="rId26"/>
+      <p:bold r:id="rId18"/>
+      <p:boldItalic r:id="rId19"/>
     </p:embeddedFont>
     <p:embeddedFont>
       <p:font typeface="Raleway ExtraBold" pitchFamily="2" charset="0"/>
-      <p:bold r:id="rId27"/>
-      <p:boldItalic r:id="rId28"/>
+      <p:bold r:id="rId20"/>
+      <p:boldItalic r:id="rId21"/>
     </p:embeddedFont>
     <p:embeddedFont>
       <p:font typeface="Roboto Medium" panose="02000000000000000000" pitchFamily="2" charset="0"/>
-      <p:regular r:id="rId29"/>
-      <p:italic r:id="rId30"/>
+      <p:regular r:id="rId22"/>
+      <p:italic r:id="rId23"/>
     </p:embeddedFont>
     <p:embeddedFont>
       <p:font typeface="Roboto" panose="02000000000000000000" pitchFamily="2"/>
-      <p:bold r:id="rId31"/>
-      <p:boldItalic r:id="rId32"/>
-    </p:embeddedFont>
-    <p:embeddedFont>
-      <p:font typeface="Segoe UI" panose="020B0502040204020203" pitchFamily="2" charset="0"/>
-      <p:regular r:id="rId33"/>
-      <p:bold r:id="rId34"/>
-      <p:italic r:id="rId35"/>
-      <p:boldItalic r:id="rId36"/>
+      <p:bold r:id="rId24"/>
+      <p:boldItalic r:id="rId25"/>
     </p:embeddedFont>
   </p:embeddedFontLst>
   <p:custDataLst>
@@ -884,7 +861,7 @@
           <a:bodyPr/>
           <a:lstStyle/>
           <a:p>
-            <a:fld id="{B3AFA368-5FDC-4B7B-8309-3DB2B329798C}" type="datetimeFigureOut">
+            <a:fld id="{E299FAED-FC4D-4BD1-92CE-9E9A9AA23E99}" type="datetimeFigureOut">
               <a:rPr lang="en-US" smtClean="0"/>
               <a:t>11/7/2009</a:t>
             </a:fld>
@@ -1048,7 +1025,7 @@
           <a:bodyPr/>
           <a:lstStyle/>
           <a:p>
-            <a:fld id="{E81D3DE0-B8A7-434A-8B80-5B4F95D040A9}" type="datetimeFigureOut">
+            <a:fld id="{1ABBEE16-8252-4D05-97FF-7DF0EC600007}" type="datetimeFigureOut">
               <a:rPr lang="en-US" smtClean="0"/>
               <a:t>11/7/2009</a:t>
             </a:fld>
@@ -1212,7 +1189,7 @@
           <a:bodyPr/>
           <a:lstStyle/>
           <a:p>
-            <a:fld id="{9946CB2E-B035-4F51-96AD-A1A184A45EBF}" type="datetimeFigureOut">
+            <a:fld id="{A72657EB-422E-4FCC-9513-9C16B8AA932A}" type="datetimeFigureOut">
               <a:rPr lang="en-US" smtClean="0"/>
               <a:t>11/7/2009</a:t>
             </a:fld>
@@ -13117,7 +13094,7 @@
           <a:bodyPr/>
           <a:lstStyle/>
           <a:p>
-            <a:fld id="{1362F47D-A2B4-454B-8C07-FB9917D4E4A5}" type="datetimeFigureOut">
+            <a:fld id="{BD2B77AC-6511-473B-93CF-1E196F86B44C}" type="datetimeFigureOut">
               <a:rPr lang="en-US" smtClean="0"/>
               <a:t>11/7/2009</a:t>
             </a:fld>
@@ -33218,7 +33195,7 @@
           <a:bodyPr/>
           <a:lstStyle/>
           <a:p>
-            <a:fld id="{A5D99D83-ECA8-400A-A825-188F8B366821}" type="datetimeFigureOut">
+            <a:fld id="{82EEE0EC-F5F4-433C-BA54-024D34DA953E}" type="datetimeFigureOut">
               <a:rPr lang="en-US" smtClean="0"/>
               <a:t>11/7/2009</a:t>
             </a:fld>
@@ -38865,7 +38842,7 @@
           <a:bodyPr/>
           <a:lstStyle/>
           <a:p>
-            <a:fld id="{98A9AE23-EB22-4DE5-8243-239979ED228B}" type="datetimeFigureOut">
+            <a:fld id="{F9F1B445-E2CE-46A0-BDBC-A1CF83331DAB}" type="datetimeFigureOut">
               <a:rPr lang="en-US" smtClean="0"/>
               <a:t>11/7/2009</a:t>
             </a:fld>
@@ -39254,7 +39231,7 @@
           <a:bodyPr/>
           <a:lstStyle/>
           <a:p>
-            <a:fld id="{5CAEE060-7193-44D7-A65A-5458854FFD3E}" type="datetimeFigureOut">
+            <a:fld id="{609ED283-9A5A-4E54-A570-7CC79408B702}" type="datetimeFigureOut">
               <a:rPr lang="en-US" smtClean="0"/>
               <a:t>11/7/2009</a:t>
             </a:fld>
@@ -39367,7 +39344,7 @@
           <a:bodyPr/>
           <a:lstStyle/>
           <a:p>
-            <a:fld id="{3A8CDAAB-93BE-4904-BA15-D8C823EC485B}" type="datetimeFigureOut">
+            <a:fld id="{CF260F94-C402-4F62-A3D3-0FB6241F98F5}" type="datetimeFigureOut">
               <a:rPr lang="en-US" smtClean="0"/>
               <a:t>11/7/2009</a:t>
             </a:fld>
@@ -39457,7 +39434,7 @@
           <a:bodyPr/>
           <a:lstStyle/>
           <a:p>
-            <a:fld id="{96213416-64B3-4C40-A392-9703A604342D}" type="datetimeFigureOut">
+            <a:fld id="{0DD35A6B-63BB-4825-8375-1EFF3E97D44A}" type="datetimeFigureOut">
               <a:rPr lang="en-US" smtClean="0"/>
               <a:t>11/7/2009</a:t>
             </a:fld>
@@ -39712,7 +39689,7 @@
           <a:bodyPr/>
           <a:lstStyle/>
           <a:p>
-            <a:fld id="{ACD7BA4D-149D-4FA1-9A1B-6F0824F2CF57}" type="datetimeFigureOut">
+            <a:fld id="{58038CA4-6006-4B4D-8AFB-31FA9CADC608}" type="datetimeFigureOut">
               <a:rPr lang="en-US" smtClean="0"/>
               <a:t>11/7/2009</a:t>
             </a:fld>
@@ -39944,7 +39921,7 @@
           <a:bodyPr/>
           <a:lstStyle/>
           <a:p>
-            <a:fld id="{ADDD9728-FBC5-4D00-B4D8-37F7442B0BEF}" type="datetimeFigureOut">
+            <a:fld id="{2B274819-C8F6-45B9-8672-07E4EE230C2F}" type="datetimeFigureOut">
               <a:rPr lang="en-US" smtClean="0"/>
               <a:t>11/7/2009</a:t>
             </a:fld>
@@ -41805,10 +41782,12 @@
           <a:p>
             <a:pPr marL="0" indent="0"/>
             <a:r>
-              <a:rPr lang="en"/>
+              <a:rPr lang="en" b="1">
+                <a:latin typeface="Arial"/>
+                <a:cs typeface="Arial"/>
+              </a:rPr>
               <a:t>ОПЕРЕЖАЙТЕ ТЕНДЕНЦИИ</a:t>
             </a:r>
-            <a:endParaRPr lang="en"/>
           </a:p>
         </p:txBody>
       </p:sp>
@@ -41838,10 +41817,19 @@
           <a:lstStyle/>
           <a:p>
             <a:r>
-              <a:rPr lang="en"/>
-              <a:t>КЛЮЧЕВЫЕ ИДЕИ ДЛЯ РЫНКА </a:t>
+              <a:rPr lang="en" b="1">
+                <a:latin typeface="Arial"/>
+                <a:cs typeface="Arial"/>
+              </a:rPr>
+              <a:t>КЛЮЧЕВЫЕ ИДЕИ ДЛЯ РЫНКА</a:t>
             </a:r>
-            <a:endParaRPr lang="en"/>
+            <a:r>
+              <a:rPr lang="en">
+                <a:latin typeface="Arial"/>
+                <a:cs typeface="Arial"/>
+              </a:rPr>
+              <a:t> </a:t>
+            </a:r>
           </a:p>
         </p:txBody>
       </p:sp>
@@ -41872,10 +41860,16 @@
           <a:p>
             <a:pPr marL="0" indent="0"/>
             <a:r>
-              <a:rPr lang="en" err="1"/>
+              <a:rPr lang="en" err="1">
+                <a:latin typeface="Arial"/>
+                <a:cs typeface="Arial"/>
+              </a:rPr>
               <a:t>Анализ существующих потребностей клиентов и выявление пробелов на рынке для поиска новых возможностей</a:t>
             </a:r>
-            <a:endParaRPr lang="ru-RU" err="1"/>
+            <a:endParaRPr lang="ru-RU" err="1">
+              <a:latin typeface="Arial"/>
+              <a:cs typeface="Arial"/>
+            </a:endParaRPr>
           </a:p>
           <a:p>
             <a:pPr marL="0" indent="0"/>
@@ -41910,10 +41904,16 @@
           <a:p>
             <a:pPr marL="0" indent="0"/>
             <a:r>
-              <a:rPr lang="en"/>
+              <a:rPr lang="en">
+                <a:latin typeface="Arial"/>
+                <a:cs typeface="Arial"/>
+              </a:rPr>
               <a:t>Используйте технологии и отзывы клиентов для разработки новых решений, которые отвечают запросам или нуждам ваших клиентов</a:t>
             </a:r>
-            <a:endParaRPr lang="ru-RU" err="1"/>
+            <a:endParaRPr lang="ru-RU">
+              <a:latin typeface="Arial"/>
+              <a:cs typeface="Arial"/>
+            </a:endParaRPr>
           </a:p>
         </p:txBody>
       </p:sp>
@@ -41944,10 +41944,16 @@
           <a:p>
             <a:pPr marL="0" indent="0"/>
             <a:r>
-              <a:rPr lang="en" err="1"/>
+              <a:rPr lang="en" err="1">
+                <a:latin typeface="Arial"/>
+                <a:cs typeface="Arial"/>
+              </a:rPr>
               <a:t>Следите за изменениями на рынке, такими как изменения в поведении потребителей или появление новых технологий, чтобы оставаться конкурентоспособными и извлекать выгоду из новых возможностей и тенденций</a:t>
             </a:r>
-            <a:endParaRPr lang="ru-RU" err="1"/>
+            <a:endParaRPr lang="ru-RU" err="1">
+              <a:latin typeface="Arial"/>
+              <a:cs typeface="Arial"/>
+            </a:endParaRPr>
           </a:p>
         </p:txBody>
       </p:sp>
@@ -41978,9 +41984,16 @@
           <a:p>
             <a:pPr marL="0" indent="0"/>
             <a:r>
-              <a:rPr lang="en"/>
+              <a:rPr lang="en">
+                <a:latin typeface="Arial"/>
+                <a:cs typeface="Arial"/>
+              </a:rPr>
               <a:t>Определите время года, когда спрос на определенные товары может резко возрасти, например, в праздничные дни или по особым случаям, и используйте это время для привлечения клиентов или увеличения продаж</a:t>
             </a:r>
+            <a:endParaRPr lang="en">
+              <a:latin typeface="Arial"/>
+              <a:cs typeface="Arial"/>
+            </a:endParaRPr>
           </a:p>
         </p:txBody>
       </p:sp>
@@ -42011,10 +42024,12 @@
           <a:p>
             <a:pPr marL="0" indent="0"/>
             <a:r>
-              <a:rPr lang="en"/>
+              <a:rPr lang="en" b="1">
+                <a:latin typeface="Arial"/>
+                <a:cs typeface="Arial"/>
+              </a:rPr>
               <a:t>ИССЛЕДЙТЕ НОВЫЕ РЫНКИ</a:t>
             </a:r>
-            <a:endParaRPr lang="en"/>
           </a:p>
         </p:txBody>
       </p:sp>
@@ -42045,10 +42060,12 @@
           <a:p>
             <a:pPr marL="0" indent="0"/>
             <a:r>
-              <a:rPr lang="en"/>
+              <a:rPr lang="en" b="1">
+                <a:latin typeface="Arial"/>
+                <a:cs typeface="Arial"/>
+              </a:rPr>
               <a:t>ИННОВАЦИОННЫЕ РЕШЕНИЯ</a:t>
             </a:r>
-            <a:endParaRPr lang="en"/>
           </a:p>
         </p:txBody>
       </p:sp>
@@ -42079,10 +42096,12 @@
           <a:p>
             <a:pPr marL="0" indent="0"/>
             <a:r>
-              <a:rPr lang="en"/>
+              <a:rPr lang="en" b="1">
+                <a:latin typeface="Arial"/>
+                <a:cs typeface="Arial"/>
+              </a:rPr>
               <a:t>СЕЗОННЫЕ ВСПЛЕСКИ</a:t>
             </a:r>
-            <a:endParaRPr lang="en"/>
           </a:p>
         </p:txBody>
       </p:sp>

--- a/slides/slide_05.pptx
+++ b/slides/slide_05.pptx
@@ -861,7 +861,7 @@
           <a:bodyPr/>
           <a:lstStyle/>
           <a:p>
-            <a:fld id="{E299FAED-FC4D-4BD1-92CE-9E9A9AA23E99}" type="datetimeFigureOut">
+            <a:fld id="{EBAA4D6B-6872-4288-B15F-438A905124F5}" type="datetimeFigureOut">
               <a:rPr lang="en-US" smtClean="0"/>
               <a:t>11/7/2009</a:t>
             </a:fld>
@@ -1025,7 +1025,7 @@
           <a:bodyPr/>
           <a:lstStyle/>
           <a:p>
-            <a:fld id="{1ABBEE16-8252-4D05-97FF-7DF0EC600007}" type="datetimeFigureOut">
+            <a:fld id="{3266800D-0FDC-4A9A-BF81-C1ECF6FB735E}" type="datetimeFigureOut">
               <a:rPr lang="en-US" smtClean="0"/>
               <a:t>11/7/2009</a:t>
             </a:fld>
@@ -1189,7 +1189,7 @@
           <a:bodyPr/>
           <a:lstStyle/>
           <a:p>
-            <a:fld id="{A72657EB-422E-4FCC-9513-9C16B8AA932A}" type="datetimeFigureOut">
+            <a:fld id="{CC8200DA-9B98-404F-BBD6-9D6167DF0355}" type="datetimeFigureOut">
               <a:rPr lang="en-US" smtClean="0"/>
               <a:t>11/7/2009</a:t>
             </a:fld>
@@ -13094,7 +13094,7 @@
           <a:bodyPr/>
           <a:lstStyle/>
           <a:p>
-            <a:fld id="{BD2B77AC-6511-473B-93CF-1E196F86B44C}" type="datetimeFigureOut">
+            <a:fld id="{B45CA17F-87E9-4464-9059-73FEAABCFA8E}" type="datetimeFigureOut">
               <a:rPr lang="en-US" smtClean="0"/>
               <a:t>11/7/2009</a:t>
             </a:fld>
@@ -33195,7 +33195,7 @@
           <a:bodyPr/>
           <a:lstStyle/>
           <a:p>
-            <a:fld id="{82EEE0EC-F5F4-433C-BA54-024D34DA953E}" type="datetimeFigureOut">
+            <a:fld id="{A8D5FD35-894F-401F-8F82-5EAD12453905}" type="datetimeFigureOut">
               <a:rPr lang="en-US" smtClean="0"/>
               <a:t>11/7/2009</a:t>
             </a:fld>
@@ -38842,7 +38842,7 @@
           <a:bodyPr/>
           <a:lstStyle/>
           <a:p>
-            <a:fld id="{F9F1B445-E2CE-46A0-BDBC-A1CF83331DAB}" type="datetimeFigureOut">
+            <a:fld id="{C7202975-3A80-4D09-8FC6-A1F95D3B40F3}" type="datetimeFigureOut">
               <a:rPr lang="en-US" smtClean="0"/>
               <a:t>11/7/2009</a:t>
             </a:fld>
@@ -39231,7 +39231,7 @@
           <a:bodyPr/>
           <a:lstStyle/>
           <a:p>
-            <a:fld id="{609ED283-9A5A-4E54-A570-7CC79408B702}" type="datetimeFigureOut">
+            <a:fld id="{8575C201-DC8C-49C5-93DE-99F99821CD20}" type="datetimeFigureOut">
               <a:rPr lang="en-US" smtClean="0"/>
               <a:t>11/7/2009</a:t>
             </a:fld>
@@ -39344,7 +39344,7 @@
           <a:bodyPr/>
           <a:lstStyle/>
           <a:p>
-            <a:fld id="{CF260F94-C402-4F62-A3D3-0FB6241F98F5}" type="datetimeFigureOut">
+            <a:fld id="{15191E28-559D-4E76-89C5-552F6BEC743B}" type="datetimeFigureOut">
               <a:rPr lang="en-US" smtClean="0"/>
               <a:t>11/7/2009</a:t>
             </a:fld>
@@ -39434,7 +39434,7 @@
           <a:bodyPr/>
           <a:lstStyle/>
           <a:p>
-            <a:fld id="{0DD35A6B-63BB-4825-8375-1EFF3E97D44A}" type="datetimeFigureOut">
+            <a:fld id="{45BAED49-D05F-47D7-BE28-59836ECC042C}" type="datetimeFigureOut">
               <a:rPr lang="en-US" smtClean="0"/>
               <a:t>11/7/2009</a:t>
             </a:fld>
@@ -39689,7 +39689,7 @@
           <a:bodyPr/>
           <a:lstStyle/>
           <a:p>
-            <a:fld id="{58038CA4-6006-4B4D-8AFB-31FA9CADC608}" type="datetimeFigureOut">
+            <a:fld id="{8A917123-E341-49AD-9CD0-BF4E86D4B8BD}" type="datetimeFigureOut">
               <a:rPr lang="en-US" smtClean="0"/>
               <a:t>11/7/2009</a:t>
             </a:fld>
@@ -39921,7 +39921,7 @@
           <a:bodyPr/>
           <a:lstStyle/>
           <a:p>
-            <a:fld id="{2B274819-C8F6-45B9-8672-07E4EE230C2F}" type="datetimeFigureOut">
+            <a:fld id="{F6772CA8-8D8A-4F05-BF57-A388B3156A2F}" type="datetimeFigureOut">
               <a:rPr lang="en-US" smtClean="0"/>
               <a:t>11/7/2009</a:t>
             </a:fld>
